--- a/docs/case-studies/greene-licensing/greene_licensing_proposal_draft.pptx
+++ b/docs/case-studies/greene-licensing/greene_licensing_proposal_draft.pptx
@@ -5025,7 +5025,7 @@
                 <a:ea typeface="Aptos" pitchFamily="34" charset="-122"/>
                 <a:cs typeface="Aptos" pitchFamily="34" charset="-120"/>
               </a:rPr>
-              <a:t>report.json sha256 9f1d03a3...c6d4 in both processes</a:t>
+              <a:t>report.json sha256 9f1d3a03...c6d4 in both processes</a:t>
             </a:r>
             <a:endParaRPr lang="en-US" sz="1500" dirty="0"/>
           </a:p>
